--- a/session5/exam-strategy/q3/q3_exam_strategy.pptx
+++ b/session5/exam-strategy/q3/q3_exam_strategy.pptx
@@ -3187,8 +3187,8 @@
         </p:nvSpPr>
         <p:spPr>
           <a:xfrm>
-            <a:off x="274320" y="685800"/>
-            <a:ext cx="6400800" cy="1645920"/>
+            <a:off x="274320" y="640080"/>
+            <a:ext cx="6583680" cy="1280160"/>
           </a:xfrm>
           <a:prstGeom prst="rect">
             <a:avLst/>
@@ -3196,13 +3196,13 @@
           <a:noFill/>
         </p:spPr>
         <p:txBody>
-          <a:bodyPr wrap="square">
+          <a:bodyPr wrap="square" tIns="0" bIns="0">
             <a:spAutoFit/>
           </a:bodyPr>
           <a:lstStyle/>
           <a:p>
             <a:pPr>
-              <a:defRPr sz="1100">
+              <a:defRPr sz="900">
                 <a:solidFill>
                   <a:srgbClr val="FFFFFF"/>
                 </a:solidFill>
@@ -3210,7 +3210,7 @@
               </a:defRPr>
             </a:pPr>
             <a:r>
-              <a:t>A developer builds an application that uses the AWS SDK for Python (Boto3) to query an Amazon DynamoDB table. When the application is tested on an Amazon EC2 instance, the application returns this error message: "An error occurred (AccessDenied) when calling the operation” The EC2 instance is associated with an existing IAM role named myRole. Which set of actions would resolve this error?</a:t>
+              <a:t>A developer builds an application that uses the AWS SDK for Python (Boto3) to query an Amazon DynamoDB table. When the application is tested on an Amazon EC2 instance, the application returns this error message: "An error occurred (AccessDenied) when calling the operation” The EC2 instance is associated with an existing IAM role named myRole. Wh...</a:t>
             </a:r>
           </a:p>
         </p:txBody>
@@ -3223,8 +3223,8 @@
         </p:nvSpPr>
         <p:spPr>
           <a:xfrm>
-            <a:off x="365760" y="2377440"/>
-            <a:ext cx="274320" cy="274320"/>
+            <a:off x="274320" y="2057400"/>
+            <a:ext cx="201168" cy="201168"/>
           </a:xfrm>
           <a:prstGeom prst="ellipse">
             <a:avLst/>
@@ -3255,7 +3255,7 @@
           <a:lstStyle/>
           <a:p>
             <a:pPr algn="ctr">
-              <a:defRPr sz="900" b="1">
+              <a:defRPr sz="700" b="1">
                 <a:solidFill>
                   <a:srgbClr val="FFFFFF"/>
                 </a:solidFill>
@@ -3275,8 +3275,8 @@
         </p:nvSpPr>
         <p:spPr>
           <a:xfrm>
-            <a:off x="777240" y="2377440"/>
-            <a:ext cx="5943600" cy="411480"/>
+            <a:off x="548640" y="2011680"/>
+            <a:ext cx="6400800" cy="736092"/>
           </a:xfrm>
           <a:prstGeom prst="rect">
             <a:avLst/>
@@ -3284,13 +3284,13 @@
           <a:noFill/>
         </p:spPr>
         <p:txBody>
-          <a:bodyPr wrap="square">
+          <a:bodyPr wrap="square" tIns="25400" bIns="0" lIns="0">
             <a:spAutoFit/>
           </a:bodyPr>
           <a:lstStyle/>
           <a:p>
             <a:pPr>
-              <a:defRPr sz="1000">
+              <a:defRPr sz="800">
                 <a:solidFill>
                   <a:srgbClr val="CCCCCC"/>
                 </a:solidFill>
@@ -3311,8 +3311,8 @@
         </p:nvSpPr>
         <p:spPr>
           <a:xfrm>
-            <a:off x="365760" y="2834640"/>
-            <a:ext cx="274320" cy="274320"/>
+            <a:off x="274320" y="2811780"/>
+            <a:ext cx="201168" cy="201168"/>
           </a:xfrm>
           <a:prstGeom prst="ellipse">
             <a:avLst/>
@@ -3343,7 +3343,7 @@
           <a:lstStyle/>
           <a:p>
             <a:pPr algn="ctr">
-              <a:defRPr sz="900" b="1">
+              <a:defRPr sz="700" b="1">
                 <a:solidFill>
                   <a:srgbClr val="FFFFFF"/>
                 </a:solidFill>
@@ -3363,8 +3363,8 @@
         </p:nvSpPr>
         <p:spPr>
           <a:xfrm>
-            <a:off x="777240" y="2834640"/>
-            <a:ext cx="5943600" cy="411480"/>
+            <a:off x="548640" y="2766060"/>
+            <a:ext cx="6400800" cy="736092"/>
           </a:xfrm>
           <a:prstGeom prst="rect">
             <a:avLst/>
@@ -3372,13 +3372,13 @@
           <a:noFill/>
         </p:spPr>
         <p:txBody>
-          <a:bodyPr wrap="square">
+          <a:bodyPr wrap="square" tIns="25400" bIns="0" lIns="0">
             <a:spAutoFit/>
           </a:bodyPr>
           <a:lstStyle/>
           <a:p>
             <a:pPr>
-              <a:defRPr sz="1000">
+              <a:defRPr sz="800">
                 <a:solidFill>
                   <a:srgbClr val="CCCCCC"/>
                 </a:solidFill>
@@ -3386,7 +3386,7 @@
               </a:defRPr>
             </a:pPr>
             <a:r>
-              <a:t>"AccessDenied" indicates an authorization error related to permissions. Multiple policies can be attached to a single IA</a:t>
+              <a:t>"AccessDenied" indicates an authorization error related to permissions. Multiple policies can be att</a:t>
             </a:r>
           </a:p>
         </p:txBody>
@@ -3399,8 +3399,8 @@
         </p:nvSpPr>
         <p:spPr>
           <a:xfrm>
-            <a:off x="365760" y="3291840"/>
-            <a:ext cx="274320" cy="274320"/>
+            <a:off x="274320" y="3566160"/>
+            <a:ext cx="201168" cy="201168"/>
           </a:xfrm>
           <a:prstGeom prst="ellipse">
             <a:avLst/>
@@ -3431,7 +3431,7 @@
           <a:lstStyle/>
           <a:p>
             <a:pPr algn="ctr">
-              <a:defRPr sz="900" b="1">
+              <a:defRPr sz="700" b="1">
                 <a:solidFill>
                   <a:srgbClr val="FFFFFF"/>
                 </a:solidFill>
@@ -3451,8 +3451,8 @@
         </p:nvSpPr>
         <p:spPr>
           <a:xfrm>
-            <a:off x="777240" y="3291840"/>
-            <a:ext cx="5943600" cy="411480"/>
+            <a:off x="548640" y="3520440"/>
+            <a:ext cx="6400800" cy="736092"/>
           </a:xfrm>
           <a:prstGeom prst="rect">
             <a:avLst/>
@@ -3460,13 +3460,13 @@
           <a:noFill/>
         </p:spPr>
         <p:txBody>
-          <a:bodyPr wrap="square">
+          <a:bodyPr wrap="square" tIns="25400" bIns="0" lIns="0">
             <a:spAutoFit/>
           </a:bodyPr>
           <a:lstStyle/>
           <a:p>
             <a:pPr>
-              <a:defRPr sz="1000">
+              <a:defRPr sz="800">
                 <a:solidFill>
                   <a:srgbClr val="CCCCCC"/>
                 </a:solidFill>
@@ -3474,7 +3474,7 @@
               </a:defRPr>
             </a:pPr>
             <a:r>
-              <a:t>"AccessDenied" indicates an authorization error related to permissions, not an authentication problem caused by credenti</a:t>
+              <a:t>"AccessDenied" indicates an authorization error related to permissions, not an authentication proble</a:t>
             </a:r>
           </a:p>
         </p:txBody>
@@ -3487,8 +3487,8 @@
         </p:nvSpPr>
         <p:spPr>
           <a:xfrm>
-            <a:off x="365760" y="3749039"/>
-            <a:ext cx="274320" cy="274320"/>
+            <a:off x="274320" y="4320540"/>
+            <a:ext cx="201168" cy="201168"/>
           </a:xfrm>
           <a:prstGeom prst="ellipse">
             <a:avLst/>
@@ -3519,7 +3519,7 @@
           <a:lstStyle/>
           <a:p>
             <a:pPr algn="ctr">
-              <a:defRPr sz="900" b="1">
+              <a:defRPr sz="700" b="1">
                 <a:solidFill>
                   <a:srgbClr val="FFFFFF"/>
                 </a:solidFill>
@@ -3539,8 +3539,8 @@
         </p:nvSpPr>
         <p:spPr>
           <a:xfrm>
-            <a:off x="777240" y="3749039"/>
-            <a:ext cx="5943600" cy="411480"/>
+            <a:off x="548640" y="4274820"/>
+            <a:ext cx="6400800" cy="736092"/>
           </a:xfrm>
           <a:prstGeom prst="rect">
             <a:avLst/>
@@ -3548,13 +3548,13 @@
           <a:noFill/>
         </p:spPr>
         <p:txBody>
-          <a:bodyPr wrap="square">
+          <a:bodyPr wrap="square" tIns="25400" bIns="0" lIns="0">
             <a:spAutoFit/>
           </a:bodyPr>
           <a:lstStyle/>
           <a:p>
             <a:pPr>
-              <a:defRPr sz="1000">
+              <a:defRPr sz="800">
                 <a:solidFill>
                   <a:srgbClr val="CCCCCC"/>
                 </a:solidFill>
@@ -3562,7 +3562,7 @@
               </a:defRPr>
             </a:pPr>
             <a:r>
-              <a:t>"AccessDenied" indicates an authorization error related to permissions, not an authentication problem caused by credenti</a:t>
+              <a:t>"AccessDenied" indicates an authorization error related to permissions, not an authentication proble</a:t>
             </a:r>
           </a:p>
         </p:txBody>
@@ -3844,8 +3844,8 @@
         </p:blipFill>
         <p:spPr>
           <a:xfrm>
-            <a:off x="182880" y="1466854"/>
-            <a:ext cx="5303520" cy="2735570"/>
+            <a:off x="182880" y="914400"/>
+            <a:ext cx="3724670" cy="3840480"/>
           </a:xfrm>
           <a:prstGeom prst="rect">
             <a:avLst/>
@@ -3980,9 +3980,9 @@
           <a:p>
             <a:pPr>
               <a:spcAft>
-                <a:spcPts val="600"/>
+                <a:spcPts val="400"/>
               </a:spcAft>
-              <a:defRPr sz="900">
+              <a:defRPr sz="800">
                 <a:solidFill>
                   <a:srgbClr val="212121"/>
                 </a:solidFill>
@@ -3990,7 +3990,7 @@
               </a:defRPr>
             </a:pPr>
             <a:r>
-              <a:t>• An EC2 instance, or any AWS principal, service, or resource, can only assume one role at a time.</a:t>
+              <a:t>• An EC2 instance, or any AWS principal, service, or resource, can only assume one role at a time</a:t>
             </a:r>
           </a:p>
         </p:txBody>
@@ -4169,8 +4169,8 @@
         </p:blipFill>
         <p:spPr>
           <a:xfrm>
-            <a:off x="182880" y="1466854"/>
-            <a:ext cx="5303520" cy="2735570"/>
+            <a:off x="182880" y="1112332"/>
+            <a:ext cx="5303520" cy="3444615"/>
           </a:xfrm>
           <a:prstGeom prst="rect">
             <a:avLst/>
@@ -4305,9 +4305,9 @@
           <a:p>
             <a:pPr>
               <a:spcAft>
-                <a:spcPts val="600"/>
+                <a:spcPts val="400"/>
               </a:spcAft>
-              <a:defRPr sz="900">
+              <a:defRPr sz="800">
                 <a:solidFill>
                   <a:srgbClr val="212121"/>
                 </a:solidFill>
@@ -4315,15 +4315,15 @@
               </a:defRPr>
             </a:pPr>
             <a:r>
-              <a:t>• "AccessDenied" indicates an authorization error related to permissions.</a:t>
+              <a:t>• "AccessDenied" indicates an authorization error related to permissions</a:t>
             </a:r>
           </a:p>
           <a:p>
             <a:pPr>
               <a:spcAft>
-                <a:spcPts val="600"/>
+                <a:spcPts val="400"/>
               </a:spcAft>
-              <a:defRPr sz="900">
+              <a:defRPr sz="800">
                 <a:solidFill>
                   <a:srgbClr val="212121"/>
                 </a:solidFill>
@@ -4331,7 +4331,7 @@
               </a:defRPr>
             </a:pPr>
             <a:r>
-              <a:t>• Multiple policies can be attached to a single IAM role.</a:t>
+              <a:t>• Multiple policies can be attached to a single IAM role</a:t>
             </a:r>
           </a:p>
         </p:txBody>
@@ -4510,8 +4510,8 @@
         </p:blipFill>
         <p:spPr>
           <a:xfrm>
-            <a:off x="182880" y="1466854"/>
-            <a:ext cx="5303520" cy="2735570"/>
+            <a:off x="182880" y="1312222"/>
+            <a:ext cx="5303520" cy="3044835"/>
           </a:xfrm>
           <a:prstGeom prst="rect">
             <a:avLst/>
@@ -4646,9 +4646,9 @@
           <a:p>
             <a:pPr>
               <a:spcAft>
-                <a:spcPts val="600"/>
+                <a:spcPts val="400"/>
               </a:spcAft>
-              <a:defRPr sz="900">
+              <a:defRPr sz="800">
                 <a:solidFill>
                   <a:srgbClr val="212121"/>
                 </a:solidFill>
@@ -4656,15 +4656,15 @@
               </a:defRPr>
             </a:pPr>
             <a:r>
-              <a:t>• "AccessDenied" indicates an authorization error related to permissions, not an authentication problem caused by credentials.</a:t>
+              <a:t>• "AccessDenied" indicates an authorization error related to permissions</a:t>
             </a:r>
           </a:p>
           <a:p>
             <a:pPr>
               <a:spcAft>
-                <a:spcPts val="600"/>
+                <a:spcPts val="400"/>
               </a:spcAft>
-              <a:defRPr sz="900">
+              <a:defRPr sz="800">
                 <a:solidFill>
                   <a:srgbClr val="212121"/>
                 </a:solidFill>
@@ -4672,15 +4672,15 @@
               </a:defRPr>
             </a:pPr>
             <a:r>
-              <a:t>• The API call is already authenticated.</a:t>
+              <a:t>• Not an authentication problem caused by credentials</a:t>
             </a:r>
           </a:p>
           <a:p>
             <a:pPr>
               <a:spcAft>
-                <a:spcPts val="600"/>
+                <a:spcPts val="400"/>
               </a:spcAft>
-              <a:defRPr sz="900">
+              <a:defRPr sz="800">
                 <a:solidFill>
                   <a:srgbClr val="212121"/>
                 </a:solidFill>
@@ -4688,15 +4688,15 @@
               </a:defRPr>
             </a:pPr>
             <a:r>
-              <a:t>• Accessing or modifying the location of AWS credentials will have no effect.</a:t>
+              <a:t>• The API call is already authenticated</a:t>
             </a:r>
           </a:p>
           <a:p>
             <a:pPr>
               <a:spcAft>
-                <a:spcPts val="600"/>
+                <a:spcPts val="400"/>
               </a:spcAft>
-              <a:defRPr sz="900">
+              <a:defRPr sz="800">
                 <a:solidFill>
                   <a:srgbClr val="212121"/>
                 </a:solidFill>
@@ -4704,7 +4704,23 @@
               </a:defRPr>
             </a:pPr>
             <a:r>
-              <a:t>• The EC2 instance profile has already performed the assume-role call because the role is already associated with the EC2 instance.</a:t>
+              <a:t>• Accessing or modifying the location of AWS credentials will have no effect</a:t>
+            </a:r>
+          </a:p>
+          <a:p>
+            <a:pPr>
+              <a:spcAft>
+                <a:spcPts val="400"/>
+              </a:spcAft>
+              <a:defRPr sz="800">
+                <a:solidFill>
+                  <a:srgbClr val="212121"/>
+                </a:solidFill>
+                <a:latin typeface="Segoe UI"/>
+              </a:defRPr>
+            </a:pPr>
+            <a:r>
+              <a:t>• The EC2 instance profile has already performed the assume-role call because the role is already associated with the EC2 instance</a:t>
             </a:r>
           </a:p>
         </p:txBody>
@@ -4883,8 +4899,8 @@
         </p:blipFill>
         <p:spPr>
           <a:xfrm>
-            <a:off x="182880" y="1776011"/>
-            <a:ext cx="5303520" cy="2117256"/>
+            <a:off x="182880" y="1263760"/>
+            <a:ext cx="5303520" cy="3141759"/>
           </a:xfrm>
           <a:prstGeom prst="rect">
             <a:avLst/>
@@ -5019,9 +5035,9 @@
           <a:p>
             <a:pPr>
               <a:spcAft>
-                <a:spcPts val="600"/>
+                <a:spcPts val="400"/>
               </a:spcAft>
-              <a:defRPr sz="900">
+              <a:defRPr sz="800">
                 <a:solidFill>
                   <a:srgbClr val="212121"/>
                 </a:solidFill>
@@ -5029,15 +5045,15 @@
               </a:defRPr>
             </a:pPr>
             <a:r>
-              <a:t>• "AccessDenied" indicates an authorization error related to permissions, not an authentication problem caused by credentials.</a:t>
+              <a:t>• "AccessDenied" indicates an authorization error related to permissions</a:t>
             </a:r>
           </a:p>
           <a:p>
             <a:pPr>
               <a:spcAft>
-                <a:spcPts val="600"/>
+                <a:spcPts val="400"/>
               </a:spcAft>
-              <a:defRPr sz="900">
+              <a:defRPr sz="800">
                 <a:solidFill>
                   <a:srgbClr val="212121"/>
                 </a:solidFill>
@@ -5045,15 +5061,15 @@
               </a:defRPr>
             </a:pPr>
             <a:r>
-              <a:t>• The API call is already authenticated.</a:t>
+              <a:t>• Not an authentication problem caused by credentials</a:t>
             </a:r>
           </a:p>
           <a:p>
             <a:pPr>
               <a:spcAft>
-                <a:spcPts val="600"/>
+                <a:spcPts val="400"/>
               </a:spcAft>
-              <a:defRPr sz="900">
+              <a:defRPr sz="800">
                 <a:solidFill>
                   <a:srgbClr val="212121"/>
                 </a:solidFill>
@@ -5061,7 +5077,23 @@
               </a:defRPr>
             </a:pPr>
             <a:r>
-              <a:t>• Accessing or modifying the location of AWS credentials will have no effect.</a:t>
+              <a:t>• The API call is already authenticated</a:t>
+            </a:r>
+          </a:p>
+          <a:p>
+            <a:pPr>
+              <a:spcAft>
+                <a:spcPts val="400"/>
+              </a:spcAft>
+              <a:defRPr sz="800">
+                <a:solidFill>
+                  <a:srgbClr val="212121"/>
+                </a:solidFill>
+                <a:latin typeface="Segoe UI"/>
+              </a:defRPr>
+            </a:pPr>
+            <a:r>
+              <a:t>• Accessing or modifying the location of AWS credentials will have no effect</a:t>
             </a:r>
           </a:p>
         </p:txBody>

--- a/session5/exam-strategy/q3/q3_exam_strategy.pptx
+++ b/session5/exam-strategy/q3/q3_exam_strategy.pptx
@@ -3187,8 +3187,8 @@
         </p:nvSpPr>
         <p:spPr>
           <a:xfrm>
-            <a:off x="274320" y="640080"/>
-            <a:ext cx="6583680" cy="1280160"/>
+            <a:off x="274320" y="685800"/>
+            <a:ext cx="6400800" cy="1645920"/>
           </a:xfrm>
           <a:prstGeom prst="rect">
             <a:avLst/>
@@ -3196,13 +3196,13 @@
           <a:noFill/>
         </p:spPr>
         <p:txBody>
-          <a:bodyPr wrap="square" tIns="0" bIns="0">
+          <a:bodyPr wrap="square">
             <a:spAutoFit/>
           </a:bodyPr>
           <a:lstStyle/>
           <a:p>
             <a:pPr>
-              <a:defRPr sz="900">
+              <a:defRPr sz="1100">
                 <a:solidFill>
                   <a:srgbClr val="FFFFFF"/>
                 </a:solidFill>
@@ -3210,7 +3210,7 @@
               </a:defRPr>
             </a:pPr>
             <a:r>
-              <a:t>A developer builds an application that uses the AWS SDK for Python (Boto3) to query an Amazon DynamoDB table. When the application is tested on an Amazon EC2 instance, the application returns this error message: "An error occurred (AccessDenied) when calling the operation” The EC2 instance is associated with an existing IAM role named myRole. Wh...</a:t>
+              <a:t>A developer builds an application that uses the AWS SDK for Python (Boto3) to query an Amazon DynamoDB table. When the application is tested on an Amazon EC2 instance, the application returns this error message: "An error occurred (AccessDenied) when calling the operation” The EC2 instance is associated with an existing IAM role named myRole. Which set of actions would resolve this error?</a:t>
             </a:r>
           </a:p>
         </p:txBody>
@@ -3223,8 +3223,8 @@
         </p:nvSpPr>
         <p:spPr>
           <a:xfrm>
-            <a:off x="274320" y="2057400"/>
-            <a:ext cx="201168" cy="201168"/>
+            <a:off x="365760" y="2377440"/>
+            <a:ext cx="274320" cy="274320"/>
           </a:xfrm>
           <a:prstGeom prst="ellipse">
             <a:avLst/>
@@ -3255,7 +3255,7 @@
           <a:lstStyle/>
           <a:p>
             <a:pPr algn="ctr">
-              <a:defRPr sz="700" b="1">
+              <a:defRPr sz="900" b="1">
                 <a:solidFill>
                   <a:srgbClr val="FFFFFF"/>
                 </a:solidFill>
@@ -3275,8 +3275,8 @@
         </p:nvSpPr>
         <p:spPr>
           <a:xfrm>
-            <a:off x="548640" y="2011680"/>
-            <a:ext cx="6400800" cy="736092"/>
+            <a:off x="777240" y="2377440"/>
+            <a:ext cx="5943600" cy="411480"/>
           </a:xfrm>
           <a:prstGeom prst="rect">
             <a:avLst/>
@@ -3284,13 +3284,13 @@
           <a:noFill/>
         </p:spPr>
         <p:txBody>
-          <a:bodyPr wrap="square" tIns="25400" bIns="0" lIns="0">
+          <a:bodyPr wrap="square">
             <a:spAutoFit/>
           </a:bodyPr>
           <a:lstStyle/>
           <a:p>
             <a:pPr>
-              <a:defRPr sz="800">
+              <a:defRPr sz="1000">
                 <a:solidFill>
                   <a:srgbClr val="CCCCCC"/>
                 </a:solidFill>
@@ -3311,8 +3311,8 @@
         </p:nvSpPr>
         <p:spPr>
           <a:xfrm>
-            <a:off x="274320" y="2811780"/>
-            <a:ext cx="201168" cy="201168"/>
+            <a:off x="365760" y="2834640"/>
+            <a:ext cx="274320" cy="274320"/>
           </a:xfrm>
           <a:prstGeom prst="ellipse">
             <a:avLst/>
@@ -3343,7 +3343,7 @@
           <a:lstStyle/>
           <a:p>
             <a:pPr algn="ctr">
-              <a:defRPr sz="700" b="1">
+              <a:defRPr sz="900" b="1">
                 <a:solidFill>
                   <a:srgbClr val="FFFFFF"/>
                 </a:solidFill>
@@ -3363,8 +3363,8 @@
         </p:nvSpPr>
         <p:spPr>
           <a:xfrm>
-            <a:off x="548640" y="2766060"/>
-            <a:ext cx="6400800" cy="736092"/>
+            <a:off x="777240" y="2834640"/>
+            <a:ext cx="5943600" cy="411480"/>
           </a:xfrm>
           <a:prstGeom prst="rect">
             <a:avLst/>
@@ -3372,13 +3372,13 @@
           <a:noFill/>
         </p:spPr>
         <p:txBody>
-          <a:bodyPr wrap="square" tIns="25400" bIns="0" lIns="0">
+          <a:bodyPr wrap="square">
             <a:spAutoFit/>
           </a:bodyPr>
           <a:lstStyle/>
           <a:p>
             <a:pPr>
-              <a:defRPr sz="800">
+              <a:defRPr sz="1000">
                 <a:solidFill>
                   <a:srgbClr val="CCCCCC"/>
                 </a:solidFill>
@@ -3386,7 +3386,7 @@
               </a:defRPr>
             </a:pPr>
             <a:r>
-              <a:t>"AccessDenied" indicates an authorization error related to permissions. Multiple policies can be att</a:t>
+              <a:t>"AccessDenied" indicates an authorization error related to permissions. Multiple policies can be attached to a single IA</a:t>
             </a:r>
           </a:p>
         </p:txBody>
@@ -3399,8 +3399,8 @@
         </p:nvSpPr>
         <p:spPr>
           <a:xfrm>
-            <a:off x="274320" y="3566160"/>
-            <a:ext cx="201168" cy="201168"/>
+            <a:off x="365760" y="3291840"/>
+            <a:ext cx="274320" cy="274320"/>
           </a:xfrm>
           <a:prstGeom prst="ellipse">
             <a:avLst/>
@@ -3431,7 +3431,7 @@
           <a:lstStyle/>
           <a:p>
             <a:pPr algn="ctr">
-              <a:defRPr sz="700" b="1">
+              <a:defRPr sz="900" b="1">
                 <a:solidFill>
                   <a:srgbClr val="FFFFFF"/>
                 </a:solidFill>
@@ -3451,8 +3451,8 @@
         </p:nvSpPr>
         <p:spPr>
           <a:xfrm>
-            <a:off x="548640" y="3520440"/>
-            <a:ext cx="6400800" cy="736092"/>
+            <a:off x="777240" y="3291840"/>
+            <a:ext cx="5943600" cy="411480"/>
           </a:xfrm>
           <a:prstGeom prst="rect">
             <a:avLst/>
@@ -3460,13 +3460,13 @@
           <a:noFill/>
         </p:spPr>
         <p:txBody>
-          <a:bodyPr wrap="square" tIns="25400" bIns="0" lIns="0">
+          <a:bodyPr wrap="square">
             <a:spAutoFit/>
           </a:bodyPr>
           <a:lstStyle/>
           <a:p>
             <a:pPr>
-              <a:defRPr sz="800">
+              <a:defRPr sz="1000">
                 <a:solidFill>
                   <a:srgbClr val="CCCCCC"/>
                 </a:solidFill>
@@ -3474,7 +3474,7 @@
               </a:defRPr>
             </a:pPr>
             <a:r>
-              <a:t>"AccessDenied" indicates an authorization error related to permissions, not an authentication proble</a:t>
+              <a:t>"AccessDenied" indicates an authorization error related to permissions, not an authentication problem caused by credenti</a:t>
             </a:r>
           </a:p>
         </p:txBody>
@@ -3487,8 +3487,8 @@
         </p:nvSpPr>
         <p:spPr>
           <a:xfrm>
-            <a:off x="274320" y="4320540"/>
-            <a:ext cx="201168" cy="201168"/>
+            <a:off x="365760" y="3749039"/>
+            <a:ext cx="274320" cy="274320"/>
           </a:xfrm>
           <a:prstGeom prst="ellipse">
             <a:avLst/>
@@ -3519,7 +3519,7 @@
           <a:lstStyle/>
           <a:p>
             <a:pPr algn="ctr">
-              <a:defRPr sz="700" b="1">
+              <a:defRPr sz="900" b="1">
                 <a:solidFill>
                   <a:srgbClr val="FFFFFF"/>
                 </a:solidFill>
@@ -3539,8 +3539,8 @@
         </p:nvSpPr>
         <p:spPr>
           <a:xfrm>
-            <a:off x="548640" y="4274820"/>
-            <a:ext cx="6400800" cy="736092"/>
+            <a:off x="777240" y="3749039"/>
+            <a:ext cx="5943600" cy="411480"/>
           </a:xfrm>
           <a:prstGeom prst="rect">
             <a:avLst/>
@@ -3548,13 +3548,13 @@
           <a:noFill/>
         </p:spPr>
         <p:txBody>
-          <a:bodyPr wrap="square" tIns="25400" bIns="0" lIns="0">
+          <a:bodyPr wrap="square">
             <a:spAutoFit/>
           </a:bodyPr>
           <a:lstStyle/>
           <a:p>
             <a:pPr>
-              <a:defRPr sz="800">
+              <a:defRPr sz="1000">
                 <a:solidFill>
                   <a:srgbClr val="CCCCCC"/>
                 </a:solidFill>
@@ -3562,7 +3562,7 @@
               </a:defRPr>
             </a:pPr>
             <a:r>
-              <a:t>"AccessDenied" indicates an authorization error related to permissions, not an authentication proble</a:t>
+              <a:t>"AccessDenied" indicates an authorization error related to permissions, not an authentication problem caused by credenti</a:t>
             </a:r>
           </a:p>
         </p:txBody>
@@ -3845,7 +3845,7 @@
         <p:spPr>
           <a:xfrm>
             <a:off x="182880" y="914400"/>
-            <a:ext cx="3724670" cy="3840480"/>
+            <a:ext cx="5101020" cy="3840480"/>
           </a:xfrm>
           <a:prstGeom prst="rect">
             <a:avLst/>
@@ -3980,9 +3980,9 @@
           <a:p>
             <a:pPr>
               <a:spcAft>
-                <a:spcPts val="400"/>
+                <a:spcPts val="600"/>
               </a:spcAft>
-              <a:defRPr sz="800">
+              <a:defRPr sz="900">
                 <a:solidFill>
                   <a:srgbClr val="212121"/>
                 </a:solidFill>
@@ -3990,7 +3990,7 @@
               </a:defRPr>
             </a:pPr>
             <a:r>
-              <a:t>• An EC2 instance, or any AWS principal, service, or resource, can only assume one role at a time</a:t>
+              <a:t>• An EC2 instance, or any AWS principal, service, or resource, can only assume one role at a time.</a:t>
             </a:r>
           </a:p>
         </p:txBody>
@@ -4169,8 +4169,8 @@
         </p:blipFill>
         <p:spPr>
           <a:xfrm>
-            <a:off x="182880" y="1112332"/>
-            <a:ext cx="5303520" cy="3444615"/>
+            <a:off x="182880" y="1337761"/>
+            <a:ext cx="5303520" cy="2993756"/>
           </a:xfrm>
           <a:prstGeom prst="rect">
             <a:avLst/>
@@ -4305,9 +4305,9 @@
           <a:p>
             <a:pPr>
               <a:spcAft>
-                <a:spcPts val="400"/>
+                <a:spcPts val="600"/>
               </a:spcAft>
-              <a:defRPr sz="800">
+              <a:defRPr sz="900">
                 <a:solidFill>
                   <a:srgbClr val="212121"/>
                 </a:solidFill>
@@ -4315,15 +4315,15 @@
               </a:defRPr>
             </a:pPr>
             <a:r>
-              <a:t>• "AccessDenied" indicates an authorization error related to permissions</a:t>
+              <a:t>• "AccessDenied" indicates an authorization error related to permissions.</a:t>
             </a:r>
           </a:p>
           <a:p>
             <a:pPr>
               <a:spcAft>
-                <a:spcPts val="400"/>
+                <a:spcPts val="600"/>
               </a:spcAft>
-              <a:defRPr sz="800">
+              <a:defRPr sz="900">
                 <a:solidFill>
                   <a:srgbClr val="212121"/>
                 </a:solidFill>
@@ -4331,7 +4331,7 @@
               </a:defRPr>
             </a:pPr>
             <a:r>
-              <a:t>• Multiple policies can be attached to a single IAM role</a:t>
+              <a:t>• Multiple policies can be attached to a single IAM role.</a:t>
             </a:r>
           </a:p>
         </p:txBody>
@@ -4510,8 +4510,8 @@
         </p:blipFill>
         <p:spPr>
           <a:xfrm>
-            <a:off x="182880" y="1312222"/>
-            <a:ext cx="5303520" cy="3044835"/>
+            <a:off x="182880" y="1072334"/>
+            <a:ext cx="5303520" cy="3524611"/>
           </a:xfrm>
           <a:prstGeom prst="rect">
             <a:avLst/>
@@ -4646,9 +4646,9 @@
           <a:p>
             <a:pPr>
               <a:spcAft>
-                <a:spcPts val="400"/>
+                <a:spcPts val="600"/>
               </a:spcAft>
-              <a:defRPr sz="800">
+              <a:defRPr sz="900">
                 <a:solidFill>
                   <a:srgbClr val="212121"/>
                 </a:solidFill>
@@ -4656,15 +4656,15 @@
               </a:defRPr>
             </a:pPr>
             <a:r>
-              <a:t>• "AccessDenied" indicates an authorization error related to permissions</a:t>
+              <a:t>• "AccessDenied" indicates an authorization error related to permissions, not an authentication problem caused by credentials.</a:t>
             </a:r>
           </a:p>
           <a:p>
             <a:pPr>
               <a:spcAft>
-                <a:spcPts val="400"/>
+                <a:spcPts val="600"/>
               </a:spcAft>
-              <a:defRPr sz="800">
+              <a:defRPr sz="900">
                 <a:solidFill>
                   <a:srgbClr val="212121"/>
                 </a:solidFill>
@@ -4672,15 +4672,15 @@
               </a:defRPr>
             </a:pPr>
             <a:r>
-              <a:t>• Not an authentication problem caused by credentials</a:t>
+              <a:t>• The API call is already authenticated.</a:t>
             </a:r>
           </a:p>
           <a:p>
             <a:pPr>
               <a:spcAft>
-                <a:spcPts val="400"/>
+                <a:spcPts val="600"/>
               </a:spcAft>
-              <a:defRPr sz="800">
+              <a:defRPr sz="900">
                 <a:solidFill>
                   <a:srgbClr val="212121"/>
                 </a:solidFill>
@@ -4688,15 +4688,15 @@
               </a:defRPr>
             </a:pPr>
             <a:r>
-              <a:t>• The API call is already authenticated</a:t>
+              <a:t>• Accessing or modifying the location of AWS credentials will have no effect.</a:t>
             </a:r>
           </a:p>
           <a:p>
             <a:pPr>
               <a:spcAft>
-                <a:spcPts val="400"/>
+                <a:spcPts val="600"/>
               </a:spcAft>
-              <a:defRPr sz="800">
+              <a:defRPr sz="900">
                 <a:solidFill>
                   <a:srgbClr val="212121"/>
                 </a:solidFill>
@@ -4704,23 +4704,7 @@
               </a:defRPr>
             </a:pPr>
             <a:r>
-              <a:t>• Accessing or modifying the location of AWS credentials will have no effect</a:t>
-            </a:r>
-          </a:p>
-          <a:p>
-            <a:pPr>
-              <a:spcAft>
-                <a:spcPts val="400"/>
-              </a:spcAft>
-              <a:defRPr sz="800">
-                <a:solidFill>
-                  <a:srgbClr val="212121"/>
-                </a:solidFill>
-                <a:latin typeface="Segoe UI"/>
-              </a:defRPr>
-            </a:pPr>
-            <a:r>
-              <a:t>• The EC2 instance profile has already performed the assume-role call because the role is already associated with the EC2 instance</a:t>
+              <a:t>• The EC2 instance profile has already performed the assume-role call because the role is already associated with the EC2 instance.</a:t>
             </a:r>
           </a:p>
         </p:txBody>
@@ -4899,8 +4883,8 @@
         </p:blipFill>
         <p:spPr>
           <a:xfrm>
-            <a:off x="182880" y="1263760"/>
-            <a:ext cx="5303520" cy="3141759"/>
+            <a:off x="182880" y="1646258"/>
+            <a:ext cx="5303520" cy="2376762"/>
           </a:xfrm>
           <a:prstGeom prst="rect">
             <a:avLst/>
@@ -5035,9 +5019,9 @@
           <a:p>
             <a:pPr>
               <a:spcAft>
-                <a:spcPts val="400"/>
+                <a:spcPts val="600"/>
               </a:spcAft>
-              <a:defRPr sz="800">
+              <a:defRPr sz="900">
                 <a:solidFill>
                   <a:srgbClr val="212121"/>
                 </a:solidFill>
@@ -5045,15 +5029,15 @@
               </a:defRPr>
             </a:pPr>
             <a:r>
-              <a:t>• "AccessDenied" indicates an authorization error related to permissions</a:t>
+              <a:t>• "AccessDenied" indicates an authorization error related to permissions, not an authentication problem caused by credentials.</a:t>
             </a:r>
           </a:p>
           <a:p>
             <a:pPr>
               <a:spcAft>
-                <a:spcPts val="400"/>
+                <a:spcPts val="600"/>
               </a:spcAft>
-              <a:defRPr sz="800">
+              <a:defRPr sz="900">
                 <a:solidFill>
                   <a:srgbClr val="212121"/>
                 </a:solidFill>
@@ -5061,15 +5045,15 @@
               </a:defRPr>
             </a:pPr>
             <a:r>
-              <a:t>• Not an authentication problem caused by credentials</a:t>
+              <a:t>• The API call is already authenticated.</a:t>
             </a:r>
           </a:p>
           <a:p>
             <a:pPr>
               <a:spcAft>
-                <a:spcPts val="400"/>
+                <a:spcPts val="600"/>
               </a:spcAft>
-              <a:defRPr sz="800">
+              <a:defRPr sz="900">
                 <a:solidFill>
                   <a:srgbClr val="212121"/>
                 </a:solidFill>
@@ -5077,23 +5061,7 @@
               </a:defRPr>
             </a:pPr>
             <a:r>
-              <a:t>• The API call is already authenticated</a:t>
-            </a:r>
-          </a:p>
-          <a:p>
-            <a:pPr>
-              <a:spcAft>
-                <a:spcPts val="400"/>
-              </a:spcAft>
-              <a:defRPr sz="800">
-                <a:solidFill>
-                  <a:srgbClr val="212121"/>
-                </a:solidFill>
-                <a:latin typeface="Segoe UI"/>
-              </a:defRPr>
-            </a:pPr>
-            <a:r>
-              <a:t>• Accessing or modifying the location of AWS credentials will have no effect</a:t>
+              <a:t>• Accessing or modifying the location of AWS credentials will have no effect.</a:t>
             </a:r>
           </a:p>
         </p:txBody>
